--- a/system-design-101/vi/lessons/sd-14-024/slides/sd-14-024.pptx
+++ b/system-design-101/vi/lessons/sd-14-024/slides/sd-14-024.pptx
@@ -9541,7 +9541,7 @@
               <a:buNone/>
             </a:pPr>
             <a:r>
-              <a:rPr lang="en-US" sz="1650" b="1" spc="224" kern="0" dirty="0">
+              <a:rPr lang="en-US" sz="1650" b="1" spc="201" kern="0" dirty="0">
                 <a:solidFill>
                   <a:srgbClr val="9A98A0"/>
                 </a:solidFill>
@@ -9549,10 +9549,10 @@
                 <a:ea typeface="Be Vietnam Pro" pitchFamily="34" charset="-122"/>
                 <a:cs typeface="Be Vietnam Pro" pitchFamily="34" charset="-120"/>
               </a:rPr>
-              <a:t>TRÊN</a:t>
-            </a:r>
-            <a:r>
-              <a:rPr lang="en-US" sz="1650" b="1" spc="178" kern="0" dirty="0">
+              <a:t>BYTE</a:t>
+            </a:r>
+            <a:r>
+              <a:rPr lang="en-US" sz="1650" b="1" spc="176" kern="0" dirty="0">
                 <a:solidFill>
                   <a:srgbClr val="9A98A0"/>
                 </a:solidFill>
@@ -9560,7 +9560,18 @@
                 <a:ea typeface="Be Vietnam Pro" pitchFamily="34" charset="-122"/>
                 <a:cs typeface="Be Vietnam Pro" pitchFamily="34" charset="-120"/>
               </a:rPr>
-              <a:t> DÂY,</a:t>
+              <a:t> BẮT</a:t>
+            </a:r>
+            <a:r>
+              <a:rPr lang="en-US" sz="1650" b="1" spc="229" kern="0" dirty="0">
+                <a:solidFill>
+                  <a:srgbClr val="9A98A0"/>
+                </a:solidFill>
+                <a:latin typeface="Be Vietnam Pro" pitchFamily="34" charset="0"/>
+                <a:ea typeface="Be Vietnam Pro" pitchFamily="34" charset="-122"/>
+                <a:cs typeface="Be Vietnam Pro" pitchFamily="34" charset="-120"/>
+              </a:rPr>
+              <a:t> ĐƯỢC</a:t>
             </a:r>
             <a:r>
               <a:rPr lang="en-US" sz="1650" b="1" spc="216" kern="0" dirty="0">
@@ -9619,7 +9630,7 @@
         <p:spPr>
           <a:xfrm>
             <a:off x="9525000" y="1752600"/>
-            <a:ext cx="7429500" cy="285750"/>
+            <a:ext cx="7524750" cy="285750"/>
           </a:xfrm>
           <a:prstGeom prst="rect">
             <a:avLst/>
@@ -9635,7 +9646,7 @@
               <a:buNone/>
             </a:pPr>
             <a:r>
-              <a:rPr lang="en-US" sz="1650" b="1" spc="180" kern="0" dirty="0">
+              <a:rPr lang="en-US" sz="1650" b="1" spc="150" kern="0" dirty="0">
                 <a:solidFill>
                   <a:srgbClr val="7C93FF"/>
                 </a:solidFill>
@@ -9643,10 +9654,10 @@
                 <a:ea typeface="Be Vietnam Pro" pitchFamily="34" charset="-122"/>
                 <a:cs typeface="Be Vietnam Pro" pitchFamily="34" charset="-120"/>
               </a:rPr>
-              <a:t>THẤY</a:t>
-            </a:r>
-            <a:r>
-              <a:rPr lang="en-US" sz="1650" b="1" spc="229" kern="0" dirty="0">
+              <a:t>TÌM</a:t>
+            </a:r>
+            <a:r>
+              <a:rPr lang="en-US" sz="1650" b="1" spc="115" kern="0" dirty="0">
                 <a:solidFill>
                   <a:srgbClr val="7C93FF"/>
                 </a:solidFill>
@@ -9654,10 +9665,54 @@
                 <a:ea typeface="Be Vietnam Pro" pitchFamily="34" charset="-122"/>
                 <a:cs typeface="Be Vietnam Pro" pitchFamily="34" charset="-120"/>
               </a:rPr>
+              <a:t> THẤY</a:t>
+            </a:r>
+            <a:r>
+              <a:rPr lang="en-US" sz="1650" b="1" spc="142" kern="0" dirty="0">
+                <a:solidFill>
+                  <a:srgbClr val="7C93FF"/>
+                </a:solidFill>
+                <a:latin typeface="Be Vietnam Pro" pitchFamily="34" charset="0"/>
+                <a:ea typeface="Be Vietnam Pro" pitchFamily="34" charset="-122"/>
+                <a:cs typeface="Be Vietnam Pro" pitchFamily="34" charset="-120"/>
+              </a:rPr>
+              <a:t> TRONG</a:t>
+            </a:r>
+            <a:r>
+              <a:rPr lang="en-US" sz="1650" b="1" spc="132" kern="0" dirty="0">
+                <a:solidFill>
+                  <a:srgbClr val="7C93FF"/>
+                </a:solidFill>
+                <a:latin typeface="Be Vietnam Pro" pitchFamily="34" charset="0"/>
+                <a:ea typeface="Be Vietnam Pro" pitchFamily="34" charset="-122"/>
+                <a:cs typeface="Be Vietnam Pro" pitchFamily="34" charset="-120"/>
+              </a:rPr>
+              <a:t> BYTE</a:t>
+            </a:r>
+            <a:r>
+              <a:rPr lang="en-US" sz="1650" b="1" spc="101" kern="0" dirty="0">
+                <a:solidFill>
+                  <a:srgbClr val="7C93FF"/>
+                </a:solidFill>
+                <a:latin typeface="Be Vietnam Pro" pitchFamily="34" charset="0"/>
+                <a:ea typeface="Be Vietnam Pro" pitchFamily="34" charset="-122"/>
+                <a:cs typeface="Be Vietnam Pro" pitchFamily="34" charset="-120"/>
+              </a:rPr>
+              <a:t> BẮT</a:t>
+            </a:r>
+            <a:r>
+              <a:rPr lang="en-US" sz="1650" b="1" spc="154" kern="0" dirty="0">
+                <a:solidFill>
+                  <a:srgbClr val="7C93FF"/>
+                </a:solidFill>
+                <a:latin typeface="Be Vietnam Pro" pitchFamily="34" charset="0"/>
+                <a:ea typeface="Be Vietnam Pro" pitchFamily="34" charset="-122"/>
+                <a:cs typeface="Be Vietnam Pro" pitchFamily="34" charset="-120"/>
+              </a:rPr>
               <a:t> ĐƯỢC</a:t>
             </a:r>
             <a:r>
-              <a:rPr lang="en-US" sz="1650" b="1" spc="228" kern="0" dirty="0">
+              <a:rPr lang="en-US" sz="1650" b="1" spc="153" kern="0" dirty="0">
                 <a:solidFill>
                   <a:srgbClr val="7C93FF"/>
                 </a:solidFill>
@@ -9668,7 +9723,7 @@
               <a:t> ·</a:t>
             </a:r>
             <a:r>
-              <a:rPr lang="en-US" sz="1650" b="1" spc="220" kern="0" dirty="0">
+              <a:rPr lang="en-US" sz="1650" b="1" spc="145" kern="0" dirty="0">
                 <a:solidFill>
                   <a:srgbClr val="7C93FF"/>
                 </a:solidFill>
@@ -9679,7 +9734,7 @@
               <a:t> TRƯỚC</a:t>
             </a:r>
             <a:r>
-              <a:rPr lang="en-US" sz="1650" b="1" spc="224" kern="0" dirty="0">
+              <a:rPr lang="en-US" sz="1650" b="1" spc="149" kern="0" dirty="0">
                 <a:solidFill>
                   <a:srgbClr val="7C93FF"/>
                 </a:solidFill>
@@ -9690,7 +9745,7 @@
               <a:t> KHI</a:t>
             </a:r>
             <a:r>
-              <a:rPr lang="en-US" sz="1650" b="1" spc="225" kern="0" dirty="0">
+              <a:rPr lang="en-US" sz="1650" b="1" spc="150" kern="0" dirty="0">
                 <a:solidFill>
                   <a:srgbClr val="7C93FF"/>
                 </a:solidFill>
@@ -9701,7 +9756,7 @@
               <a:t> MÃ</a:t>
             </a:r>
             <a:r>
-              <a:rPr lang="en-US" sz="1650" b="1" spc="208" kern="0" dirty="0">
+              <a:rPr lang="en-US" sz="1650" b="1" spc="133" kern="0" dirty="0">
                 <a:solidFill>
                   <a:srgbClr val="7C93FF"/>
                 </a:solidFill>
@@ -10022,8 +10077,8 @@
         </p:nvSpPr>
         <p:spPr>
           <a:xfrm>
-            <a:off x="9525000" y="4457700"/>
-            <a:ext cx="7429500" cy="285750"/>
+            <a:off x="9525000" y="4362450"/>
+            <a:ext cx="7524750" cy="285750"/>
           </a:xfrm>
           <a:prstGeom prst="rect">
             <a:avLst/>
@@ -10039,7 +10094,7 @@
               <a:buNone/>
             </a:pPr>
             <a:r>
-              <a:rPr lang="en-US" sz="1650" b="1" spc="224" kern="0" dirty="0">
+              <a:rPr lang="en-US" sz="1650" b="1" spc="74" kern="0" dirty="0">
                 <a:solidFill>
                   <a:srgbClr val="7C93FF"/>
                 </a:solidFill>
@@ -10050,7 +10105,7 @@
               <a:t>KHÔNG</a:t>
             </a:r>
             <a:r>
-              <a:rPr lang="en-US" sz="1650" b="1" spc="190" kern="0" dirty="0">
+              <a:rPr lang="en-US" sz="1650" b="1" spc="76" kern="0" dirty="0">
                 <a:solidFill>
                   <a:srgbClr val="7C93FF"/>
                 </a:solidFill>
@@ -10058,10 +10113,21 @@
                 <a:ea typeface="Be Vietnam Pro" pitchFamily="34" charset="-122"/>
                 <a:cs typeface="Be Vietnam Pro" pitchFamily="34" charset="-120"/>
               </a:rPr>
+              <a:t> TÌM</a:t>
+            </a:r>
+            <a:r>
+              <a:rPr lang="en-US" sz="1650" b="1" spc="40" kern="0" dirty="0">
+                <a:solidFill>
+                  <a:srgbClr val="7C93FF"/>
+                </a:solidFill>
+                <a:latin typeface="Be Vietnam Pro" pitchFamily="34" charset="0"/>
+                <a:ea typeface="Be Vietnam Pro" pitchFamily="34" charset="-122"/>
+                <a:cs typeface="Be Vietnam Pro" pitchFamily="34" charset="-120"/>
+              </a:rPr>
               <a:t> THẤY</a:t>
             </a:r>
             <a:r>
-              <a:rPr lang="en-US" sz="1650" b="1" spc="228" kern="0" dirty="0">
+              <a:rPr lang="en-US" sz="1650" b="1" spc="67" kern="0" dirty="0">
                 <a:solidFill>
                   <a:srgbClr val="7C93FF"/>
                 </a:solidFill>
@@ -10069,10 +10135,54 @@
                 <a:ea typeface="Be Vietnam Pro" pitchFamily="34" charset="-122"/>
                 <a:cs typeface="Be Vietnam Pro" pitchFamily="34" charset="-120"/>
               </a:rPr>
+              <a:t> TRONG</a:t>
+            </a:r>
+            <a:r>
+              <a:rPr lang="en-US" sz="1650" b="1" spc="57" kern="0" dirty="0">
+                <a:solidFill>
+                  <a:srgbClr val="7C93FF"/>
+                </a:solidFill>
+                <a:latin typeface="Be Vietnam Pro" pitchFamily="34" charset="0"/>
+                <a:ea typeface="Be Vietnam Pro" pitchFamily="34" charset="-122"/>
+                <a:cs typeface="Be Vietnam Pro" pitchFamily="34" charset="-120"/>
+              </a:rPr>
+              <a:t> BYTE</a:t>
+            </a:r>
+            <a:r>
+              <a:rPr lang="en-US" sz="1650" b="1" spc="26" kern="0" dirty="0">
+                <a:solidFill>
+                  <a:srgbClr val="7C93FF"/>
+                </a:solidFill>
+                <a:latin typeface="Be Vietnam Pro" pitchFamily="34" charset="0"/>
+                <a:ea typeface="Be Vietnam Pro" pitchFamily="34" charset="-122"/>
+                <a:cs typeface="Be Vietnam Pro" pitchFamily="34" charset="-120"/>
+              </a:rPr>
+              <a:t> BẮT</a:t>
+            </a:r>
+            <a:r>
+              <a:rPr lang="en-US" sz="1650" b="1" spc="79" kern="0" dirty="0">
+                <a:solidFill>
+                  <a:srgbClr val="7C93FF"/>
+                </a:solidFill>
+                <a:latin typeface="Be Vietnam Pro" pitchFamily="34" charset="0"/>
+                <a:ea typeface="Be Vietnam Pro" pitchFamily="34" charset="-122"/>
+                <a:cs typeface="Be Vietnam Pro" pitchFamily="34" charset="-120"/>
+              </a:rPr>
+              <a:t> ĐƯỢC</a:t>
+            </a:r>
+            <a:r>
+              <a:rPr lang="en-US" sz="1650" b="1" spc="78" kern="0" dirty="0">
+                <a:solidFill>
+                  <a:srgbClr val="7C93FF"/>
+                </a:solidFill>
+                <a:latin typeface="Be Vietnam Pro" pitchFamily="34" charset="0"/>
+                <a:ea typeface="Be Vietnam Pro" pitchFamily="34" charset="-122"/>
+                <a:cs typeface="Be Vietnam Pro" pitchFamily="34" charset="-120"/>
+              </a:rPr>
               <a:t> ·</a:t>
             </a:r>
             <a:r>
-              <a:rPr lang="en-US" sz="1650" b="1" spc="215" kern="0" dirty="0">
+              <a:rPr lang="en-US" sz="1650" b="1" spc="65" kern="0" dirty="0">
                 <a:solidFill>
                   <a:srgbClr val="7C93FF"/>
                 </a:solidFill>
@@ -10083,7 +10193,7 @@
               <a:t> SAU</a:t>
             </a:r>
             <a:r>
-              <a:rPr lang="en-US" sz="1650" b="1" spc="224" kern="0" dirty="0">
+              <a:rPr lang="en-US" sz="1650" b="1" spc="74" kern="0" dirty="0">
                 <a:solidFill>
                   <a:srgbClr val="7C93FF"/>
                 </a:solidFill>
@@ -10094,7 +10204,7 @@
               <a:t> KHI</a:t>
             </a:r>
             <a:r>
-              <a:rPr lang="en-US" sz="1650" b="1" spc="226" kern="0" dirty="0">
+              <a:rPr lang="en-US" sz="1650" b="1" spc="76" kern="0" dirty="0">
                 <a:solidFill>
                   <a:srgbClr val="7C93FF"/>
                 </a:solidFill>
@@ -10105,7 +10215,7 @@
               <a:t> MÃ</a:t>
             </a:r>
             <a:r>
-              <a:rPr lang="en-US" sz="1650" b="1" spc="208" kern="0" dirty="0">
+              <a:rPr lang="en-US" sz="1650" b="1" spc="58" kern="0" dirty="0">
                 <a:solidFill>
                   <a:srgbClr val="7C93FF"/>
                 </a:solidFill>
@@ -10127,7 +10237,7 @@
         </p:nvSpPr>
         <p:spPr>
           <a:xfrm>
-            <a:off x="9525000" y="4876800"/>
+            <a:off x="9525000" y="4762500"/>
             <a:ext cx="2857500" cy="609600"/>
           </a:xfrm>
           <a:prstGeom prst="roundRect">
@@ -10173,7 +10283,7 @@
         </p:nvSpPr>
         <p:spPr>
           <a:xfrm>
-            <a:off x="12573000" y="4876800"/>
+            <a:off x="12573000" y="4762500"/>
             <a:ext cx="4419600" cy="609600"/>
           </a:xfrm>
           <a:prstGeom prst="roundRect">
@@ -10219,7 +10329,7 @@
         </p:nvSpPr>
         <p:spPr>
           <a:xfrm>
-            <a:off x="9525000" y="5619750"/>
+            <a:off x="9525000" y="5505450"/>
             <a:ext cx="2857500" cy="323850"/>
           </a:xfrm>
           <a:prstGeom prst="rect">
@@ -10280,7 +10390,7 @@
         </p:nvSpPr>
         <p:spPr>
           <a:xfrm>
-            <a:off x="12573000" y="5619750"/>
+            <a:off x="12573000" y="5505450"/>
             <a:ext cx="4419600" cy="323850"/>
           </a:xfrm>
           <a:prstGeom prst="rect">
@@ -10363,8 +10473,8 @@
         </p:nvSpPr>
         <p:spPr>
           <a:xfrm>
-            <a:off x="9525000" y="6096000"/>
-            <a:ext cx="7429500" cy="323850"/>
+            <a:off x="9525000" y="5981700"/>
+            <a:ext cx="7429500" cy="762000"/>
           </a:xfrm>
           <a:prstGeom prst="rect">
             <a:avLst/>
@@ -10373,10 +10483,13 @@
           <a:ln/>
         </p:spPr>
         <p:txBody>
-          <a:bodyPr wrap="square" lIns="0" tIns="0" rIns="0" bIns="0" rtlCol="0" anchor="t"/>
+          <a:bodyPr wrap="square" lIns="0" tIns="9716" rIns="0" bIns="-9716" rtlCol="0" anchor="t"/>
           <a:lstStyle/>
           <a:p>
             <a:pPr algn="l" indent="0" marL="0">
+              <a:lnSpc>
+                <a:spcPts val="2340"/>
+              </a:lnSpc>
               <a:buNone/>
             </a:pPr>
             <a:r>
@@ -10455,6 +10568,92 @@
                 <a:cs typeface="Be Vietnam Pro" pitchFamily="34" charset="-120"/>
               </a:rPr>
               <a:t> ngay.</a:t>
+            </a:r>
+            <a:endParaRPr lang="en-US" sz="1800" dirty="0"/>
+          </a:p>
+          <a:p>
+            <a:pPr algn="l" indent="0" marL="0">
+              <a:lnSpc>
+                <a:spcPts val="2340"/>
+              </a:lnSpc>
+              <a:buNone/>
+            </a:pPr>
+            <a:r>
+              <a:rPr lang="en-US" sz="1800" dirty="0" spc="3" kern="0">
+                <a:solidFill>
+                  <a:srgbClr val="FF6A4D"/>
+                </a:solidFill>
+                <a:latin typeface="Be Vietnam Pro SemiBold" pitchFamily="34" charset="0"/>
+                <a:ea typeface="Be Vietnam Pro SemiBold" pitchFamily="34" charset="-122"/>
+                <a:cs typeface="Be Vietnam Pro SemiBold" pitchFamily="34" charset="-120"/>
+              </a:rPr>
+              <a:t>Kích</a:t>
+            </a:r>
+            <a:r>
+              <a:rPr lang="en-US" sz="1800" dirty="0" spc="7" kern="0">
+                <a:solidFill>
+                  <a:srgbClr val="FF6A4D"/>
+                </a:solidFill>
+                <a:latin typeface="Be Vietnam Pro SemiBold" pitchFamily="34" charset="0"/>
+                <a:ea typeface="Be Vietnam Pro SemiBold" pitchFamily="34" charset="-122"/>
+                <a:cs typeface="Be Vietnam Pro SemiBold" pitchFamily="34" charset="-120"/>
+              </a:rPr>
+              <a:t> thước</a:t>
+            </a:r>
+            <a:r>
+              <a:rPr lang="en-US" sz="1800" dirty="0" spc="1" kern="0">
+                <a:solidFill>
+                  <a:srgbClr val="FF6A4D"/>
+                </a:solidFill>
+                <a:latin typeface="Be Vietnam Pro SemiBold" pitchFamily="34" charset="0"/>
+                <a:ea typeface="Be Vietnam Pro SemiBold" pitchFamily="34" charset="-122"/>
+                <a:cs typeface="Be Vietnam Pro SemiBold" pitchFamily="34" charset="-120"/>
+              </a:rPr>
+              <a:t> hai</a:t>
+            </a:r>
+            <a:r>
+              <a:rPr lang="en-US" sz="1800" dirty="0" spc="-1" kern="0">
+                <a:solidFill>
+                  <a:srgbClr val="FF6A4D"/>
+                </a:solidFill>
+                <a:latin typeface="Be Vietnam Pro SemiBold" pitchFamily="34" charset="0"/>
+                <a:ea typeface="Be Vietnam Pro SemiBold" pitchFamily="34" charset="-122"/>
+                <a:cs typeface="Be Vietnam Pro SemiBold" pitchFamily="34" charset="-120"/>
+              </a:rPr>
+              <a:t> chiều</a:t>
+            </a:r>
+            <a:r>
+              <a:rPr lang="en-US" sz="1800" dirty="0" spc="-10" kern="0">
+                <a:solidFill>
+                  <a:srgbClr val="FF6A4D"/>
+                </a:solidFill>
+                <a:latin typeface="Be Vietnam Pro SemiBold" pitchFamily="34" charset="0"/>
+                <a:ea typeface="Be Vietnam Pro SemiBold" pitchFamily="34" charset="-122"/>
+                <a:cs typeface="Be Vietnam Pro SemiBold" pitchFamily="34" charset="-120"/>
+              </a:rPr>
+              <a:t> vẫn</a:t>
+            </a:r>
+            <a:r>
+              <a:rPr lang="en-US" sz="1800" dirty="0" spc="3" kern="0">
+                <a:solidFill>
+                  <a:srgbClr val="FF6A4D"/>
+                </a:solidFill>
+                <a:latin typeface="Be Vietnam Pro SemiBold" pitchFamily="34" charset="0"/>
+                <a:ea typeface="Be Vietnam Pro SemiBold" pitchFamily="34" charset="-122"/>
+                <a:cs typeface="Be Vietnam Pro SemiBold" pitchFamily="34" charset="-120"/>
+              </a:rPr>
+              <a:t> đếm</a:t>
+            </a:r>
+            <a:r>
+              <a:rPr lang="en-US" sz="1800" dirty="0" spc="7" kern="0">
+                <a:solidFill>
+                  <a:srgbClr val="FF6A4D"/>
+                </a:solidFill>
+                <a:latin typeface="Be Vietnam Pro SemiBold" pitchFamily="34" charset="0"/>
+                <a:ea typeface="Be Vietnam Pro SemiBold" pitchFamily="34" charset="-122"/>
+                <a:cs typeface="Be Vietnam Pro SemiBold" pitchFamily="34" charset="-120"/>
+              </a:rPr>
+              <a:t> được.</a:t>
             </a:r>
             <a:endParaRPr lang="en-US" sz="1800" dirty="0"/>
           </a:p>
@@ -13884,7 +14083,7 @@
         <p:spPr>
           <a:xfrm>
             <a:off x="914400" y="3676650"/>
-            <a:ext cx="7429500" cy="1238250"/>
+            <a:ext cx="7429500" cy="1619250"/>
           </a:xfrm>
           <a:prstGeom prst="rect">
             <a:avLst/>
@@ -13958,7 +14157,7 @@
               <a:t> mã</a:t>
             </a:r>
             <a:r>
-              <a:rPr lang="en-US" sz="2550" dirty="0" spc="-4" kern="0">
+              <a:rPr lang="en-US" sz="2550" dirty="0" spc="-2" kern="0">
                 <a:solidFill>
                   <a:srgbClr val="D8D3C4"/>
                 </a:solidFill>
@@ -13966,7 +14165,40 @@
                 <a:ea typeface="Be Vietnam Pro" pitchFamily="34" charset="-122"/>
                 <a:cs typeface="Be Vietnam Pro" pitchFamily="34" charset="-120"/>
               </a:rPr>
-              <a:t> hóa,</a:t>
+              <a:t> hóa:</a:t>
+            </a:r>
+            <a:r>
+              <a:rPr lang="en-US" sz="2550" dirty="0" spc="-12" kern="0">
+                <a:solidFill>
+                  <a:srgbClr val="D8D3C4"/>
+                </a:solidFill>
+                <a:latin typeface="Be Vietnam Pro" pitchFamily="34" charset="0"/>
+                <a:ea typeface="Be Vietnam Pro" pitchFamily="34" charset="-122"/>
+                <a:cs typeface="Be Vietnam Pro" pitchFamily="34" charset="-120"/>
+              </a:rPr>
+              <a:t> tên</a:t>
+            </a:r>
+            <a:r>
+              <a:rPr lang="en-US" sz="2550" dirty="0" spc="5" kern="0">
+                <a:solidFill>
+                  <a:srgbClr val="D8D3C4"/>
+                </a:solidFill>
+                <a:latin typeface="Be Vietnam Pro" pitchFamily="34" charset="0"/>
+                <a:ea typeface="Be Vietnam Pro" pitchFamily="34" charset="-122"/>
+                <a:cs typeface="Be Vietnam Pro" pitchFamily="34" charset="-120"/>
+              </a:rPr>
+              <a:t> người</a:t>
+            </a:r>
+            <a:r>
+              <a:rPr lang="en-US" sz="2550" dirty="0" spc="-1" kern="0">
+                <a:solidFill>
+                  <a:srgbClr val="D8D3C4"/>
+                </a:solidFill>
+                <a:latin typeface="Be Vietnam Pro" pitchFamily="34" charset="0"/>
+                <a:ea typeface="Be Vietnam Pro" pitchFamily="34" charset="-122"/>
+                <a:cs typeface="Be Vietnam Pro" pitchFamily="34" charset="-120"/>
+              </a:rPr>
+              <a:t> dùng</a:t>
             </a:r>
             <a:r>
               <a:rPr lang="en-US" sz="2550" dirty="0" spc="0" kern="0">
@@ -13977,10 +14209,10 @@
                 <a:ea typeface="Be Vietnam Pro" pitchFamily="34" charset="-122"/>
                 <a:cs typeface="Be Vietnam Pro" pitchFamily="34" charset="-120"/>
               </a:rPr>
-              <a:t> nên</a:t>
-            </a:r>
-            <a:r>
-              <a:rPr lang="en-US" sz="2550" dirty="0" spc="-11" kern="0">
+              <a:t> không có</a:t>
+            </a:r>
+            <a:r>
+              <a:rPr lang="en-US" sz="2550" dirty="0" spc="-16" kern="0">
                 <a:solidFill>
                   <a:srgbClr val="D8D3C4"/>
                 </a:solidFill>
@@ -13988,10 +14220,10 @@
                 <a:ea typeface="Be Vietnam Pro" pitchFamily="34" charset="-122"/>
                 <a:cs typeface="Be Vietnam Pro" pitchFamily="34" charset="-120"/>
               </a:rPr>
-              <a:t> tên</a:t>
-            </a:r>
-            <a:r>
-              <a:rPr lang="en-US" sz="2550" dirty="0" spc="5" kern="0">
+              <a:t> trong</a:t>
+            </a:r>
+            <a:r>
+              <a:rPr lang="en-US" sz="2550" dirty="0" spc="-17" kern="0">
                 <a:solidFill>
                   <a:srgbClr val="D8D3C4"/>
                 </a:solidFill>
@@ -13999,10 +14231,10 @@
                 <a:ea typeface="Be Vietnam Pro" pitchFamily="34" charset="-122"/>
                 <a:cs typeface="Be Vietnam Pro" pitchFamily="34" charset="-120"/>
               </a:rPr>
-              <a:t> người</a:t>
-            </a:r>
-            <a:r>
-              <a:rPr lang="en-US" sz="2550" dirty="0" spc="-1" kern="0">
+              <a:t> byte</a:t>
+            </a:r>
+            <a:r>
+              <a:rPr lang="en-US" sz="2550" dirty="0" spc="-15" kern="0">
                 <a:solidFill>
                   <a:srgbClr val="D8D3C4"/>
                 </a:solidFill>
@@ -14010,10 +14242,10 @@
                 <a:ea typeface="Be Vietnam Pro" pitchFamily="34" charset="-122"/>
                 <a:cs typeface="Be Vietnam Pro" pitchFamily="34" charset="-120"/>
               </a:rPr>
-              <a:t> dùng</a:t>
-            </a:r>
-            <a:r>
-              <a:rPr lang="en-US" sz="2550" dirty="0" spc="0" kern="0">
+              <a:t> bắt</a:t>
+            </a:r>
+            <a:r>
+              <a:rPr lang="en-US" sz="2550" dirty="0" spc="6" kern="0">
                 <a:solidFill>
                   <a:srgbClr val="D8D3C4"/>
                 </a:solidFill>
@@ -14021,29 +14253,7 @@
                 <a:ea typeface="Be Vietnam Pro" pitchFamily="34" charset="-122"/>
                 <a:cs typeface="Be Vietnam Pro" pitchFamily="34" charset="-120"/>
               </a:rPr>
-              <a:t> không lộ</a:t>
-            </a:r>
-            <a:r>
-              <a:rPr lang="en-US" sz="2550" dirty="0" spc="-20" kern="0">
-                <a:solidFill>
-                  <a:srgbClr val="D8D3C4"/>
-                </a:solidFill>
-                <a:latin typeface="Be Vietnam Pro" pitchFamily="34" charset="0"/>
-                <a:ea typeface="Be Vietnam Pro" pitchFamily="34" charset="-122"/>
-                <a:cs typeface="Be Vietnam Pro" pitchFamily="34" charset="-120"/>
-              </a:rPr>
-              <a:t> trên</a:t>
-            </a:r>
-            <a:r>
-              <a:rPr lang="en-US" sz="2550" dirty="0" spc="-6" kern="0">
-                <a:solidFill>
-                  <a:srgbClr val="D8D3C4"/>
-                </a:solidFill>
-                <a:latin typeface="Be Vietnam Pro" pitchFamily="34" charset="0"/>
-                <a:ea typeface="Be Vietnam Pro" pitchFamily="34" charset="-122"/>
-                <a:cs typeface="Be Vietnam Pro" pitchFamily="34" charset="-120"/>
-              </a:rPr>
-              <a:t> dây.</a:t>
+              <a:t> được.</a:t>
             </a:r>
             <a:endParaRPr lang="en-US" sz="2550" dirty="0"/>
           </a:p>
